--- a/templates/carousels/soil-regenerators-in-the-wild.pptx
+++ b/templates/carousels/soil-regenerators-in-the-wild.pptx
@@ -3868,7 +3868,7 @@
           <a:p>
             <a:pPr algn="ctr"/>
             <a:r>
-              <a:rPr sz="2250" b="1" i="0">
+              <a:rPr sz="3000" b="1" i="0">
                 <a:solidFill>
                   <a:srgbClr val="22371F"/>
                 </a:solidFill>
@@ -3880,7 +3880,7 @@
           <a:p>
             <a:pPr algn="ctr"/>
             <a:r>
-              <a:rPr sz="2250" b="1" i="0">
+              <a:rPr sz="3000" b="1" i="0">
                 <a:solidFill>
                   <a:srgbClr val="22371F"/>
                 </a:solidFill>
@@ -3944,7 +3944,7 @@
         <p:spPr>
           <a:xfrm>
             <a:off x="571500" y="571500"/>
-            <a:ext cx="6667500" cy="381000"/>
+            <a:ext cx="9144000" cy="381000"/>
           </a:xfrm>
           <a:prstGeom prst="rect">
             <a:avLst/>
@@ -3959,7 +3959,7 @@
           <a:p>
             <a:pPr algn="l"/>
             <a:r>
-              <a:rPr sz="2100" b="1" i="0">
+              <a:rPr sz="3000" b="1" i="0">
                 <a:solidFill>
                   <a:srgbClr val="DBE6A7"/>
                 </a:solidFill>
@@ -3978,8 +3978,8 @@
         </p:nvSpPr>
         <p:spPr>
           <a:xfrm>
-            <a:off x="571500" y="8858250"/>
-            <a:ext cx="9144000" cy="1809750"/>
+            <a:off x="571500" y="8572500"/>
+            <a:ext cx="9144000" cy="2381250"/>
           </a:xfrm>
           <a:prstGeom prst="rect">
             <a:avLst/>
@@ -3998,7 +3998,7 @@
               </a:lnSpc>
             </a:pPr>
             <a:r>
-              <a:rPr sz="4200" b="1" i="0">
+              <a:rPr sz="5700" b="1" i="0">
                 <a:solidFill>
                   <a:srgbClr val="FFFFFF"/>
                 </a:solidFill>
@@ -4014,7 +4014,7 @@
               </a:lnSpc>
             </a:pPr>
             <a:r>
-              <a:rPr sz="4200" b="1" i="0">
+              <a:rPr sz="5700" b="1" i="0">
                 <a:solidFill>
                   <a:srgbClr val="FFFFFF"/>
                 </a:solidFill>
@@ -4033,8 +4033,8 @@
         </p:nvSpPr>
         <p:spPr>
           <a:xfrm>
-            <a:off x="571500" y="10953750"/>
-            <a:ext cx="9144000" cy="762000"/>
+            <a:off x="571500" y="11334750"/>
+            <a:ext cx="9144000" cy="571500"/>
           </a:xfrm>
           <a:prstGeom prst="rect">
             <a:avLst/>
@@ -4049,13 +4049,13 @@
           <a:p>
             <a:pPr algn="l"/>
             <a:r>
-              <a:rPr sz="2550" b="0" i="1">
+              <a:rPr sz="3000" b="0" i="1">
                 <a:solidFill>
                   <a:srgbClr val="DBE6A7"/>
                 </a:solidFill>
                 <a:latin typeface="EB Garamond"/>
               </a:rPr>
-              <a:t>[COPY: Allison] One warm, proud line. Say what they are known for locally.</a:t>
+              <a:t>[COPY: Allison] One proud line about them.</a:t>
             </a:r>
           </a:p>
         </p:txBody>
@@ -4374,7 +4374,7 @@
           <a:p>
             <a:pPr algn="ctr"/>
             <a:r>
-              <a:rPr sz="2250" b="1" i="0">
+              <a:rPr sz="3000" b="1" i="0">
                 <a:solidFill>
                   <a:srgbClr val="22371F"/>
                 </a:solidFill>
@@ -4386,7 +4386,7 @@
           <a:p>
             <a:pPr algn="ctr"/>
             <a:r>
-              <a:rPr sz="2250" b="1" i="0">
+              <a:rPr sz="3000" b="1" i="0">
                 <a:solidFill>
                   <a:srgbClr val="22371F"/>
                 </a:solidFill>
@@ -4421,7 +4421,7 @@
           <a:p>
             <a:pPr algn="l"/>
             <a:r>
-              <a:rPr sz="2250" b="1" i="0">
+              <a:rPr sz="3000" b="1" i="0">
                 <a:solidFill>
                   <a:srgbClr val="156826"/>
                 </a:solidFill>
@@ -4460,13 +4460,13 @@
               </a:lnSpc>
             </a:pPr>
             <a:r>
-              <a:rPr sz="3900" b="0" i="0">
+              <a:rPr sz="5700" b="0" i="0">
                 <a:solidFill>
                   <a:srgbClr val="22371F"/>
                 </a:solidFill>
                 <a:latin typeface="EB Garamond"/>
               </a:rPr>
-              <a:t>[COPY: Allison] One line. Plain and honest, e.g. what the ground was like the year they began.</a:t>
+              <a:t>[COPY: Allison] One line: how it began.</a:t>
             </a:r>
           </a:p>
         </p:txBody>
@@ -4495,7 +4495,7 @@
           <a:p>
             <a:pPr algn="l"/>
             <a:r>
-              <a:rPr sz="2100" b="1" i="0">
+              <a:rPr sz="3000" b="1" i="0">
                 <a:solidFill>
                   <a:srgbClr val="6A665C"/>
                 </a:solidFill>
@@ -4761,7 +4761,7 @@
         <p:spPr>
           <a:xfrm>
             <a:off x="571500" y="571500"/>
-            <a:ext cx="6667500" cy="381000"/>
+            <a:ext cx="9144000" cy="381000"/>
           </a:xfrm>
           <a:prstGeom prst="rect">
             <a:avLst/>
@@ -4776,7 +4776,7 @@
           <a:p>
             <a:pPr algn="l"/>
             <a:r>
-              <a:rPr sz="2100" b="1" i="0">
+              <a:rPr sz="3000" b="1" i="0">
                 <a:solidFill>
                   <a:srgbClr val="156826"/>
                 </a:solidFill>
@@ -4815,7 +4815,7 @@
               </a:lnSpc>
             </a:pPr>
             <a:r>
-              <a:rPr sz="4500" b="1" i="0">
+              <a:rPr sz="5700" b="1" i="0">
                 <a:solidFill>
                   <a:srgbClr val="22371F"/>
                 </a:solidFill>
@@ -4894,13 +4894,13 @@
           <a:p>
             <a:pPr algn="l"/>
             <a:r>
-              <a:rPr sz="3000" b="0" i="1">
+              <a:rPr sz="5700" b="0" i="1">
                 <a:solidFill>
                   <a:srgbClr val="333130"/>
                 </a:solidFill>
                 <a:latin typeface="EB Garamond"/>
               </a:rPr>
-              <a:t>[COPY: Allison] Optional second line: why, in the graduate's own words. Warm, not salesy.</a:t>
+              <a:t>[COPY: Allison] Optional: why, in their words.</a:t>
             </a:r>
           </a:p>
         </p:txBody>
@@ -4929,7 +4929,7 @@
           <a:p>
             <a:pPr algn="l"/>
             <a:r>
-              <a:rPr sz="2100" b="1" i="0">
+              <a:rPr sz="3000" b="1" i="0">
                 <a:solidFill>
                   <a:srgbClr val="6A665C"/>
                 </a:solidFill>
@@ -5195,7 +5195,7 @@
         <p:spPr>
           <a:xfrm>
             <a:off x="571500" y="571500"/>
-            <a:ext cx="6667500" cy="381000"/>
+            <a:ext cx="9144000" cy="381000"/>
           </a:xfrm>
           <a:prstGeom prst="rect">
             <a:avLst/>
@@ -5210,7 +5210,7 @@
           <a:p>
             <a:pPr algn="l"/>
             <a:r>
-              <a:rPr sz="2100" b="1" i="0">
+              <a:rPr sz="3000" b="1" i="0">
                 <a:solidFill>
                   <a:srgbClr val="DBE6A7"/>
                 </a:solidFill>
@@ -5245,13 +5245,13 @@
           <a:p>
             <a:pPr algn="l"/>
             <a:r>
-              <a:rPr sz="1950" b="1" i="0">
+              <a:rPr sz="3000" b="1" i="0">
                 <a:solidFill>
                   <a:srgbClr val="C9A227"/>
                 </a:solidFill>
                 <a:latin typeface="Montserrat"/>
               </a:rPr>
-              <a:t>[COPY: Allison] Big number, from the source below.</a:t>
+              <a:t>[COPY: Allison] Big number</a:t>
             </a:r>
           </a:p>
         </p:txBody>
@@ -5315,13 +5315,13 @@
           <a:p>
             <a:pPr algn="l"/>
             <a:r>
-              <a:rPr sz="3450" b="0" i="0">
+              <a:rPr sz="5700" b="0" i="0">
                 <a:solidFill>
                   <a:srgbClr val="FFFFFF"/>
                 </a:solidFill>
                 <a:latin typeface="EB Garamond"/>
               </a:rPr>
-              <a:t>[COPY: Allison] What the number measures, in one line, with units and the comparison (against what).</a:t>
+              <a:t>[COPY: Allison] What it measures, against what.</a:t>
             </a:r>
           </a:p>
         </p:txBody>
@@ -5350,13 +5350,13 @@
           <a:p>
             <a:pPr algn="l"/>
             <a:r>
-              <a:rPr sz="1950" b="0" i="0">
+              <a:rPr sz="3000" b="0" i="0">
                 <a:solidFill>
                   <a:srgbClr val="A7B097"/>
                 </a:solidFill>
                 <a:latin typeface="Source Sans 3"/>
               </a:rPr>
-              <a:t>[COPY: Allison] Source line: who measured it, where, which year. No source, no number.</a:t>
+              <a:t>[COPY: Allison] Source: who, where, year.</a:t>
             </a:r>
           </a:p>
         </p:txBody>
@@ -5385,7 +5385,7 @@
           <a:p>
             <a:pPr algn="l"/>
             <a:r>
-              <a:rPr sz="2100" b="1" i="0">
+              <a:rPr sz="3000" b="1" i="0">
                 <a:solidFill>
                   <a:srgbClr val="A7B097"/>
                 </a:solidFill>
@@ -5705,13 +5705,13 @@
               </a:lnSpc>
             </a:pPr>
             <a:r>
-              <a:rPr sz="4950" b="0" i="1">
+              <a:rPr sz="5700" b="0" i="1">
                 <a:solidFill>
                   <a:srgbClr val="22371F"/>
                 </a:solidFill>
                 <a:latin typeface="EB Garamond"/>
               </a:rPr>
-              <a:t>[COPY: Allison] Short quote from the graduate, three lines at most. Their voice, not ours.</a:t>
+              <a:t>[COPY: Allison] Short quote, their own words.</a:t>
             </a:r>
           </a:p>
         </p:txBody>
@@ -5740,7 +5740,7 @@
           <a:p>
             <a:pPr algn="l"/>
             <a:r>
-              <a:rPr sz="2550" b="1" i="0">
+              <a:rPr sz="3000" b="1" i="0">
                 <a:solidFill>
                   <a:srgbClr val="156826"/>
                 </a:solidFill>
@@ -5759,7 +5759,7 @@
         </p:nvSpPr>
         <p:spPr>
           <a:xfrm>
-            <a:off x="571500" y="9906000"/>
+            <a:off x="571500" y="10001250"/>
             <a:ext cx="9144000" cy="476250"/>
           </a:xfrm>
           <a:prstGeom prst="rect">
@@ -5775,7 +5775,7 @@
           <a:p>
             <a:pPr algn="l"/>
             <a:r>
-              <a:rPr sz="2550" b="1" i="0">
+              <a:rPr sz="3000" b="1" i="0">
                 <a:solidFill>
                   <a:srgbClr val="6A665C"/>
                 </a:solidFill>

--- a/templates/carousels/soil-regenerators-in-the-wild.pptx
+++ b/templates/carousels/soil-regenerators-in-the-wild.pptx
@@ -3788,7 +3788,7 @@
     <p:bg>
       <p:bgPr>
         <a:solidFill>
-          <a:srgbClr val="22371F"/>
+          <a:srgbClr val="1E3F1D"/>
         </a:solidFill>
         <a:effectLst/>
       </p:bgPr>
@@ -3815,7 +3815,7 @@
             <a:avLst/>
           </a:prstGeom>
           <a:solidFill>
-            <a:srgbClr val="A7B097"/>
+            <a:srgbClr val="B1BCB1"/>
           </a:solidFill>
           <a:ln>
             <a:noFill/>
@@ -3870,7 +3870,7 @@
             <a:r>
               <a:rPr sz="3000" b="1" i="0">
                 <a:solidFill>
-                  <a:srgbClr val="22371F"/>
+                  <a:srgbClr val="1E3F1D"/>
                 </a:solidFill>
                 <a:latin typeface="Montserrat"/>
               </a:rPr>
@@ -3882,7 +3882,7 @@
             <a:r>
               <a:rPr sz="3000" b="1" i="0">
                 <a:solidFill>
-                  <a:srgbClr val="22371F"/>
+                  <a:srgbClr val="1E3F1D"/>
                 </a:solidFill>
                 <a:latin typeface="Montserrat"/>
               </a:rPr>
@@ -3906,7 +3906,7 @@
             <a:avLst/>
           </a:prstGeom>
           <a:solidFill>
-            <a:srgbClr val="22371F"/>
+            <a:srgbClr val="1E3F1D"/>
           </a:solidFill>
           <a:ln>
             <a:noFill/>
@@ -3961,7 +3961,7 @@
             <a:r>
               <a:rPr sz="3000" b="1" i="0">
                 <a:solidFill>
-                  <a:srgbClr val="DBE6A7"/>
+                  <a:srgbClr val="B1BCB1"/>
                 </a:solidFill>
                 <a:latin typeface="Montserrat"/>
               </a:rPr>
@@ -4051,7 +4051,7 @@
             <a:r>
               <a:rPr sz="3000" b="0" i="1">
                 <a:solidFill>
-                  <a:srgbClr val="DBE6A7"/>
+                  <a:srgbClr val="B1BCB1"/>
                 </a:solidFill>
                 <a:latin typeface="EB Garamond"/>
               </a:rPr>
@@ -4075,7 +4075,7 @@
             <a:avLst/>
           </a:prstGeom>
           <a:solidFill>
-            <a:srgbClr val="DBE6A7"/>
+            <a:srgbClr val="B1BCB1"/>
           </a:solidFill>
           <a:ln>
             <a:noFill/>
@@ -4294,7 +4294,7 @@
     <p:bg>
       <p:bgPr>
         <a:solidFill>
-          <a:srgbClr val="F4F1EA"/>
+          <a:srgbClr val="F3F1EA"/>
         </a:solidFill>
         <a:effectLst/>
       </p:bgPr>
@@ -4321,7 +4321,7 @@
             <a:avLst/>
           </a:prstGeom>
           <a:solidFill>
-            <a:srgbClr val="A7B097"/>
+            <a:srgbClr val="B1BCB1"/>
           </a:solidFill>
           <a:ln>
             <a:noFill/>
@@ -4376,7 +4376,7 @@
             <a:r>
               <a:rPr sz="3000" b="1" i="0">
                 <a:solidFill>
-                  <a:srgbClr val="22371F"/>
+                  <a:srgbClr val="1E3F1D"/>
                 </a:solidFill>
                 <a:latin typeface="Montserrat"/>
               </a:rPr>
@@ -4388,7 +4388,7 @@
             <a:r>
               <a:rPr sz="3000" b="1" i="0">
                 <a:solidFill>
-                  <a:srgbClr val="22371F"/>
+                  <a:srgbClr val="1E3F1D"/>
                 </a:solidFill>
                 <a:latin typeface="Montserrat"/>
               </a:rPr>
@@ -4423,7 +4423,7 @@
             <a:r>
               <a:rPr sz="3000" b="1" i="0">
                 <a:solidFill>
-                  <a:srgbClr val="156826"/>
+                  <a:srgbClr val="31662F"/>
                 </a:solidFill>
                 <a:latin typeface="Montserrat"/>
               </a:rPr>
@@ -4462,7 +4462,7 @@
             <a:r>
               <a:rPr sz="5700" b="0" i="0">
                 <a:solidFill>
-                  <a:srgbClr val="22371F"/>
+                  <a:srgbClr val="1E3F1D"/>
                 </a:solidFill>
                 <a:latin typeface="EB Garamond"/>
               </a:rPr>
@@ -4521,7 +4521,7 @@
             <a:avLst/>
           </a:prstGeom>
           <a:solidFill>
-            <a:srgbClr val="A7B097"/>
+            <a:srgbClr val="B1BCB1"/>
           </a:solidFill>
           <a:ln>
             <a:noFill/>
@@ -4565,7 +4565,7 @@
             <a:avLst/>
           </a:prstGeom>
           <a:solidFill>
-            <a:srgbClr val="156826"/>
+            <a:srgbClr val="31662F"/>
           </a:solidFill>
           <a:ln>
             <a:noFill/>
@@ -4609,7 +4609,7 @@
             <a:avLst/>
           </a:prstGeom>
           <a:solidFill>
-            <a:srgbClr val="A7B097"/>
+            <a:srgbClr val="B1BCB1"/>
           </a:solidFill>
           <a:ln>
             <a:noFill/>
@@ -4653,7 +4653,7 @@
             <a:avLst/>
           </a:prstGeom>
           <a:solidFill>
-            <a:srgbClr val="A7B097"/>
+            <a:srgbClr val="B1BCB1"/>
           </a:solidFill>
           <a:ln>
             <a:noFill/>
@@ -4697,7 +4697,7 @@
             <a:avLst/>
           </a:prstGeom>
           <a:solidFill>
-            <a:srgbClr val="A7B097"/>
+            <a:srgbClr val="B1BCB1"/>
           </a:solidFill>
           <a:ln>
             <a:noFill/>
@@ -4778,7 +4778,7 @@
             <a:r>
               <a:rPr sz="3000" b="1" i="0">
                 <a:solidFill>
-                  <a:srgbClr val="156826"/>
+                  <a:srgbClr val="31662F"/>
                 </a:solidFill>
                 <a:latin typeface="Montserrat"/>
               </a:rPr>
@@ -4817,7 +4817,7 @@
             <a:r>
               <a:rPr sz="5700" b="1" i="0">
                 <a:solidFill>
-                  <a:srgbClr val="22371F"/>
+                  <a:srgbClr val="1E3F1D"/>
                 </a:solidFill>
                 <a:latin typeface="Montserrat"/>
               </a:rPr>
@@ -4841,7 +4841,7 @@
             <a:avLst/>
           </a:prstGeom>
           <a:solidFill>
-            <a:srgbClr val="156826"/>
+            <a:srgbClr val="31662F"/>
           </a:solidFill>
           <a:ln>
             <a:noFill/>
@@ -4955,7 +4955,7 @@
             <a:avLst/>
           </a:prstGeom>
           <a:solidFill>
-            <a:srgbClr val="A7B097"/>
+            <a:srgbClr val="B1BCB1"/>
           </a:solidFill>
           <a:ln>
             <a:noFill/>
@@ -4999,7 +4999,7 @@
             <a:avLst/>
           </a:prstGeom>
           <a:solidFill>
-            <a:srgbClr val="A7B097"/>
+            <a:srgbClr val="B1BCB1"/>
           </a:solidFill>
           <a:ln>
             <a:noFill/>
@@ -5043,7 +5043,7 @@
             <a:avLst/>
           </a:prstGeom>
           <a:solidFill>
-            <a:srgbClr val="156826"/>
+            <a:srgbClr val="31662F"/>
           </a:solidFill>
           <a:ln>
             <a:noFill/>
@@ -5087,7 +5087,7 @@
             <a:avLst/>
           </a:prstGeom>
           <a:solidFill>
-            <a:srgbClr val="A7B097"/>
+            <a:srgbClr val="B1BCB1"/>
           </a:solidFill>
           <a:ln>
             <a:noFill/>
@@ -5131,7 +5131,7 @@
             <a:avLst/>
           </a:prstGeom>
           <a:solidFill>
-            <a:srgbClr val="A7B097"/>
+            <a:srgbClr val="B1BCB1"/>
           </a:solidFill>
           <a:ln>
             <a:noFill/>
@@ -5174,7 +5174,7 @@
     <p:bg>
       <p:bgPr>
         <a:solidFill>
-          <a:srgbClr val="22371F"/>
+          <a:srgbClr val="1E3F1D"/>
         </a:solidFill>
         <a:effectLst/>
       </p:bgPr>
@@ -5212,7 +5212,7 @@
             <a:r>
               <a:rPr sz="3000" b="1" i="0">
                 <a:solidFill>
-                  <a:srgbClr val="DBE6A7"/>
+                  <a:srgbClr val="B1BCB1"/>
                 </a:solidFill>
                 <a:latin typeface="Montserrat"/>
               </a:rPr>
@@ -5247,7 +5247,7 @@
             <a:r>
               <a:rPr sz="3000" b="1" i="0">
                 <a:solidFill>
-                  <a:srgbClr val="C9A227"/>
+                  <a:srgbClr val="D39C48"/>
                 </a:solidFill>
                 <a:latin typeface="Montserrat"/>
               </a:rPr>
@@ -5282,7 +5282,7 @@
             <a:r>
               <a:rPr sz="12750" b="1" i="0">
                 <a:solidFill>
-                  <a:srgbClr val="C9A227"/>
+                  <a:srgbClr val="D39C48"/>
                 </a:solidFill>
                 <a:latin typeface="Montserrat"/>
               </a:rPr>
@@ -5352,7 +5352,7 @@
             <a:r>
               <a:rPr sz="3000" b="0" i="0">
                 <a:solidFill>
-                  <a:srgbClr val="A7B097"/>
+                  <a:srgbClr val="B1BCB1"/>
                 </a:solidFill>
                 <a:latin typeface="Source Sans 3"/>
               </a:rPr>
@@ -5387,7 +5387,7 @@
             <a:r>
               <a:rPr sz="3000" b="1" i="0">
                 <a:solidFill>
-                  <a:srgbClr val="A7B097"/>
+                  <a:srgbClr val="B1BCB1"/>
                 </a:solidFill>
                 <a:latin typeface="Montserrat"/>
               </a:rPr>
@@ -5543,7 +5543,7 @@
             <a:avLst/>
           </a:prstGeom>
           <a:solidFill>
-            <a:srgbClr val="DBE6A7"/>
+            <a:srgbClr val="B1BCB1"/>
           </a:solidFill>
           <a:ln>
             <a:noFill/>
@@ -5630,7 +5630,7 @@
     <p:bg>
       <p:bgPr>
         <a:solidFill>
-          <a:srgbClr val="F4F1EA"/>
+          <a:srgbClr val="F3F1EA"/>
         </a:solidFill>
         <a:effectLst/>
       </p:bgPr>
@@ -5668,7 +5668,7 @@
             <a:r>
               <a:rPr sz="19500" b="1" i="0">
                 <a:solidFill>
-                  <a:srgbClr val="156826"/>
+                  <a:srgbClr val="31662F"/>
                 </a:solidFill>
                 <a:latin typeface="EB Garamond"/>
               </a:rPr>
@@ -5707,7 +5707,7 @@
             <a:r>
               <a:rPr sz="5700" b="0" i="1">
                 <a:solidFill>
-                  <a:srgbClr val="22371F"/>
+                  <a:srgbClr val="1E3F1D"/>
                 </a:solidFill>
                 <a:latin typeface="EB Garamond"/>
               </a:rPr>
@@ -5742,7 +5742,7 @@
             <a:r>
               <a:rPr sz="3000" b="1" i="0">
                 <a:solidFill>
-                  <a:srgbClr val="156826"/>
+                  <a:srgbClr val="31662F"/>
                 </a:solidFill>
                 <a:latin typeface="Montserrat"/>
               </a:rPr>
@@ -5801,7 +5801,7 @@
             <a:avLst/>
           </a:prstGeom>
           <a:solidFill>
-            <a:srgbClr val="A7B097"/>
+            <a:srgbClr val="B1BCB1"/>
           </a:solidFill>
           <a:ln>
             <a:noFill/>
@@ -5845,7 +5845,7 @@
             <a:avLst/>
           </a:prstGeom>
           <a:solidFill>
-            <a:srgbClr val="A7B097"/>
+            <a:srgbClr val="B1BCB1"/>
           </a:solidFill>
           <a:ln>
             <a:noFill/>
@@ -5889,7 +5889,7 @@
             <a:avLst/>
           </a:prstGeom>
           <a:solidFill>
-            <a:srgbClr val="A7B097"/>
+            <a:srgbClr val="B1BCB1"/>
           </a:solidFill>
           <a:ln>
             <a:noFill/>
@@ -5933,7 +5933,7 @@
             <a:avLst/>
           </a:prstGeom>
           <a:solidFill>
-            <a:srgbClr val="A7B097"/>
+            <a:srgbClr val="B1BCB1"/>
           </a:solidFill>
           <a:ln>
             <a:noFill/>
@@ -5977,7 +5977,7 @@
             <a:avLst/>
           </a:prstGeom>
           <a:solidFill>
-            <a:srgbClr val="156826"/>
+            <a:srgbClr val="31662F"/>
           </a:solidFill>
           <a:ln>
             <a:noFill/>
